--- a/prompt_engineering/pe-2-2_techniques_IntructionPrompting.pptx
+++ b/prompt_engineering/pe-2-2_techniques_IntructionPrompting.pptx
@@ -217,7 +217,7 @@
           <a:p>
             <a:fld id="{7BAEECA8-D063-486F-AE31-5020270C1449}" type="datetimeFigureOut">
               <a:rPr lang="en-US" smtClean="0"/>
-              <a:t>6/16/2026</a:t>
+              <a:t>7/10/2026</a:t>
             </a:fld>
             <a:endParaRPr lang="en-US"/>
           </a:p>
@@ -459,7 +459,7 @@
           <a:p>
             <a:fld id="{6383FAE1-13DE-4511-8C1B-C8AFB720664C}" type="datetimeFigureOut">
               <a:rPr lang="en-US" smtClean="0"/>
-              <a:t>6/16/2026</a:t>
+              <a:t>7/9/2026</a:t>
             </a:fld>
             <a:endParaRPr lang="en-US"/>
           </a:p>
@@ -657,7 +657,7 @@
           <a:p>
             <a:fld id="{6383FAE1-13DE-4511-8C1B-C8AFB720664C}" type="datetimeFigureOut">
               <a:rPr lang="en-US" smtClean="0"/>
-              <a:t>6/16/2026</a:t>
+              <a:t>7/9/2026</a:t>
             </a:fld>
             <a:endParaRPr lang="en-US"/>
           </a:p>
@@ -865,7 +865,7 @@
           <a:p>
             <a:fld id="{6383FAE1-13DE-4511-8C1B-C8AFB720664C}" type="datetimeFigureOut">
               <a:rPr lang="en-US" smtClean="0"/>
-              <a:t>6/16/2026</a:t>
+              <a:t>7/9/2026</a:t>
             </a:fld>
             <a:endParaRPr lang="en-US"/>
           </a:p>
@@ -1063,7 +1063,7 @@
           <a:p>
             <a:fld id="{6383FAE1-13DE-4511-8C1B-C8AFB720664C}" type="datetimeFigureOut">
               <a:rPr lang="en-US" smtClean="0"/>
-              <a:t>6/16/2026</a:t>
+              <a:t>7/9/2026</a:t>
             </a:fld>
             <a:endParaRPr lang="en-US"/>
           </a:p>
@@ -1338,7 +1338,7 @@
           <a:p>
             <a:fld id="{6383FAE1-13DE-4511-8C1B-C8AFB720664C}" type="datetimeFigureOut">
               <a:rPr lang="en-US" smtClean="0"/>
-              <a:t>6/16/2026</a:t>
+              <a:t>7/9/2026</a:t>
             </a:fld>
             <a:endParaRPr lang="en-US"/>
           </a:p>
@@ -1603,7 +1603,7 @@
           <a:p>
             <a:fld id="{6383FAE1-13DE-4511-8C1B-C8AFB720664C}" type="datetimeFigureOut">
               <a:rPr lang="en-US" smtClean="0"/>
-              <a:t>6/16/2026</a:t>
+              <a:t>7/9/2026</a:t>
             </a:fld>
             <a:endParaRPr lang="en-US"/>
           </a:p>
@@ -2015,7 +2015,7 @@
           <a:p>
             <a:fld id="{6383FAE1-13DE-4511-8C1B-C8AFB720664C}" type="datetimeFigureOut">
               <a:rPr lang="en-US" smtClean="0"/>
-              <a:t>6/16/2026</a:t>
+              <a:t>7/9/2026</a:t>
             </a:fld>
             <a:endParaRPr lang="en-US"/>
           </a:p>
@@ -2156,7 +2156,7 @@
           <a:p>
             <a:fld id="{6383FAE1-13DE-4511-8C1B-C8AFB720664C}" type="datetimeFigureOut">
               <a:rPr lang="en-US" smtClean="0"/>
-              <a:t>6/16/2026</a:t>
+              <a:t>7/9/2026</a:t>
             </a:fld>
             <a:endParaRPr lang="en-US"/>
           </a:p>
@@ -2269,7 +2269,7 @@
           <a:p>
             <a:fld id="{6383FAE1-13DE-4511-8C1B-C8AFB720664C}" type="datetimeFigureOut">
               <a:rPr lang="en-US" smtClean="0"/>
-              <a:t>6/16/2026</a:t>
+              <a:t>7/9/2026</a:t>
             </a:fld>
             <a:endParaRPr lang="en-US"/>
           </a:p>
@@ -2580,7 +2580,7 @@
           <a:p>
             <a:fld id="{6383FAE1-13DE-4511-8C1B-C8AFB720664C}" type="datetimeFigureOut">
               <a:rPr lang="en-US" smtClean="0"/>
-              <a:t>6/16/2026</a:t>
+              <a:t>7/9/2026</a:t>
             </a:fld>
             <a:endParaRPr lang="en-US"/>
           </a:p>
@@ -2871,7 +2871,7 @@
           <a:p>
             <a:fld id="{6383FAE1-13DE-4511-8C1B-C8AFB720664C}" type="datetimeFigureOut">
               <a:rPr lang="en-US" smtClean="0"/>
-              <a:t>6/16/2026</a:t>
+              <a:t>7/9/2026</a:t>
             </a:fld>
             <a:endParaRPr lang="en-US"/>
           </a:p>
@@ -3115,7 +3115,7 @@
           <a:p>
             <a:fld id="{6383FAE1-13DE-4511-8C1B-C8AFB720664C}" type="datetimeFigureOut">
               <a:rPr lang="en-US" smtClean="0"/>
-              <a:t>6/16/2026</a:t>
+              <a:t>7/9/2026</a:t>
             </a:fld>
             <a:endParaRPr lang="en-US"/>
           </a:p>
@@ -3806,8 +3806,8 @@
         </p:nvSpPr>
         <p:spPr>
           <a:xfrm>
-            <a:off x="1330452" y="1887004"/>
-            <a:ext cx="10245852" cy="2308324"/>
+            <a:off x="1449324" y="1120676"/>
+            <a:ext cx="10245852" cy="4893647"/>
           </a:xfrm>
           <a:prstGeom prst="rect">
             <a:avLst/>
@@ -3900,6 +3900,145 @@
                 </a:solidFill>
               </a:rPr>
               <a:t>what output format to follow.</a:t>
+            </a:r>
+          </a:p>
+          <a:p>
+            <a:pPr marL="342900" indent="-342900">
+              <a:buFont typeface="Arial" panose="020B0604020202020204" pitchFamily="34" charset="0"/>
+              <a:buChar char="•"/>
+            </a:pPr>
+            <a:endParaRPr lang="en-US" sz="2400" b="1" dirty="0">
+              <a:solidFill>
+                <a:schemeClr val="accent6">
+                  <a:lumMod val="60000"/>
+                  <a:lumOff val="40000"/>
+                </a:schemeClr>
+              </a:solidFill>
+            </a:endParaRPr>
+          </a:p>
+          <a:p>
+            <a:r>
+              <a:rPr lang="en-US" sz="2400" dirty="0">
+                <a:solidFill>
+                  <a:schemeClr val="accent6">
+                    <a:lumMod val="60000"/>
+                    <a:lumOff val="40000"/>
+                  </a:schemeClr>
+                </a:solidFill>
+              </a:rPr>
+              <a:t>The key parts are:</a:t>
+            </a:r>
+          </a:p>
+          <a:p>
+            <a:pPr marL="342900" indent="-342900">
+              <a:buFont typeface="Arial" panose="020B0604020202020204" pitchFamily="34" charset="0"/>
+              <a:buChar char="•"/>
+            </a:pPr>
+            <a:r>
+              <a:rPr lang="en-US" sz="2400" b="1" dirty="0">
+                <a:solidFill>
+                  <a:schemeClr val="accent6">
+                    <a:lumMod val="60000"/>
+                    <a:lumOff val="40000"/>
+                  </a:schemeClr>
+                </a:solidFill>
+              </a:rPr>
+              <a:t>The task</a:t>
+            </a:r>
+            <a:r>
+              <a:rPr lang="en-US" sz="2400" dirty="0">
+                <a:solidFill>
+                  <a:schemeClr val="accent6">
+                    <a:lumMod val="60000"/>
+                    <a:lumOff val="40000"/>
+                  </a:schemeClr>
+                </a:solidFill>
+              </a:rPr>
+              <a:t> (what to compute, derive, or explain)</a:t>
+            </a:r>
+          </a:p>
+          <a:p>
+            <a:pPr marL="342900" indent="-342900">
+              <a:buFont typeface="Arial" panose="020B0604020202020204" pitchFamily="34" charset="0"/>
+              <a:buChar char="•"/>
+            </a:pPr>
+            <a:r>
+              <a:rPr lang="en-US" sz="2400" b="1" dirty="0">
+                <a:solidFill>
+                  <a:schemeClr val="accent6">
+                    <a:lumMod val="60000"/>
+                    <a:lumOff val="40000"/>
+                  </a:schemeClr>
+                </a:solidFill>
+              </a:rPr>
+              <a:t>The format</a:t>
+            </a:r>
+            <a:r>
+              <a:rPr lang="en-US" sz="2400" dirty="0">
+                <a:solidFill>
+                  <a:schemeClr val="accent6">
+                    <a:lumMod val="60000"/>
+                    <a:lumOff val="40000"/>
+                  </a:schemeClr>
+                </a:solidFill>
+              </a:rPr>
+              <a:t> (equation, table, step-by-step derivation, code)</a:t>
+            </a:r>
+          </a:p>
+          <a:p>
+            <a:pPr marL="342900" indent="-342900">
+              <a:buFont typeface="Arial" panose="020B0604020202020204" pitchFamily="34" charset="0"/>
+              <a:buChar char="•"/>
+            </a:pPr>
+            <a:r>
+              <a:rPr lang="en-US" sz="2400" b="1" dirty="0">
+                <a:solidFill>
+                  <a:schemeClr val="accent6">
+                    <a:lumMod val="60000"/>
+                    <a:lumOff val="40000"/>
+                  </a:schemeClr>
+                </a:solidFill>
+              </a:rPr>
+              <a:t>The constraints</a:t>
+            </a:r>
+            <a:r>
+              <a:rPr lang="en-US" sz="2400" dirty="0">
+                <a:solidFill>
+                  <a:schemeClr val="accent6">
+                    <a:lumMod val="60000"/>
+                    <a:lumOff val="40000"/>
+                  </a:schemeClr>
+                </a:solidFill>
+              </a:rPr>
+              <a:t> (assumptions, units, precision, notation conventions)</a:t>
+            </a:r>
+          </a:p>
+          <a:p>
+            <a:pPr marL="342900" indent="-342900">
+              <a:buFont typeface="Arial" panose="020B0604020202020204" pitchFamily="34" charset="0"/>
+              <a:buChar char="•"/>
+            </a:pPr>
+            <a:r>
+              <a:rPr lang="en-US" sz="2400" b="1" dirty="0">
+                <a:solidFill>
+                  <a:schemeClr val="accent6">
+                    <a:lumMod val="60000"/>
+                    <a:lumOff val="40000"/>
+                  </a:schemeClr>
+                </a:solidFill>
+              </a:rPr>
+              <a:t>The audience/level</a:t>
+            </a:r>
+            <a:r>
+              <a:rPr lang="en-US" sz="2400" dirty="0">
+                <a:solidFill>
+                  <a:schemeClr val="accent6">
+                    <a:lumMod val="60000"/>
+                    <a:lumOff val="40000"/>
+                  </a:schemeClr>
+                </a:solidFill>
+              </a:rPr>
+              <a:t> (undergraduate vs. graduate, which changes rigor and vocabulary)</a:t>
             </a:r>
           </a:p>
         </p:txBody>
@@ -3955,7 +4094,7 @@
         <p:spPr>
           <a:xfrm>
             <a:off x="384048" y="856357"/>
-            <a:ext cx="10552176" cy="6001643"/>
+            <a:ext cx="10552176" cy="4524315"/>
           </a:xfrm>
           <a:prstGeom prst="rect">
             <a:avLst/>
@@ -4025,8 +4164,29 @@
                   </a:schemeClr>
                 </a:solidFill>
               </a:rPr>
-              <a:t>Explain what a decision tree is. </a:t>
-            </a:r>
+              <a:t>Explain,  what a decision tree is in machine learning. </a:t>
+            </a:r>
+          </a:p>
+          <a:p>
+            <a:pPr>
+              <a:buNone/>
+            </a:pPr>
+            <a:r>
+              <a:rPr lang="en-US" sz="2400" b="1" dirty="0">
+                <a:solidFill>
+                  <a:schemeClr val="accent4">
+                    <a:lumMod val="60000"/>
+                    <a:lumOff val="40000"/>
+                  </a:schemeClr>
+                </a:solidFill>
+              </a:rPr>
+              <a:t>Instructions: </a:t>
+            </a:r>
+          </a:p>
+          <a:p>
+            <a:pPr>
+              <a:buNone/>
+            </a:pPr>
             <a:r>
               <a:rPr lang="en-US" sz="2400" b="1" u="sng" dirty="0">
                 <a:solidFill>
@@ -4036,36 +4196,23 @@
                   </a:schemeClr>
                 </a:solidFill>
               </a:rPr>
-              <a:t>Use simple language. Keep the answer under 100 words.</a:t>
+              <a:t>Use simple language. </a:t>
             </a:r>
           </a:p>
           <a:p>
             <a:pPr>
               <a:buNone/>
             </a:pPr>
-            <a:endParaRPr lang="en-US" sz="2400" b="1" dirty="0">
-              <a:solidFill>
-                <a:schemeClr val="accent6">
-                  <a:lumMod val="60000"/>
-                  <a:lumOff val="40000"/>
-                </a:schemeClr>
-              </a:solidFill>
-            </a:endParaRPr>
-          </a:p>
-          <a:p>
-            <a:pPr>
-              <a:buNone/>
-            </a:pPr>
-            <a:r>
-              <a:rPr lang="en-US" sz="2400" b="1" dirty="0">
+            <a:r>
+              <a:rPr lang="en-US" sz="2400" b="1" u="sng" dirty="0">
                 <a:solidFill>
-                  <a:schemeClr val="accent6">
+                  <a:schemeClr val="accent4">
                     <a:lumMod val="60000"/>
                     <a:lumOff val="40000"/>
                   </a:schemeClr>
                 </a:solidFill>
               </a:rPr>
-              <a:t>Output</a:t>
+              <a:t>Keep the answer under 100 words. </a:t>
             </a:r>
           </a:p>
           <a:p>
@@ -4073,15 +4220,15 @@
               <a:buNone/>
             </a:pPr>
             <a:r>
-              <a:rPr lang="en-US" sz="2400" dirty="0">
+              <a:rPr lang="en-US" sz="2400" b="1" u="sng" dirty="0">
                 <a:solidFill>
-                  <a:schemeClr val="accent6">
+                  <a:schemeClr val="accent4">
                     <a:lumMod val="60000"/>
                     <a:lumOff val="40000"/>
                   </a:schemeClr>
                 </a:solidFill>
               </a:rPr>
-              <a:t>A decision tree is a machine learning model that makes decisions by asking a series of yes/no questions. It starts at a root node and splits data into branches based on features, eventually reaching a final prediction or decision at a leaf node. It is easy to understand and visualize, which makes it popular for classification and regression tasks.</a:t>
+              <a:t>Assume that audience  are fresh graduates.</a:t>
             </a:r>
           </a:p>
           <a:p>
@@ -4110,7 +4257,7 @@
                   </a:schemeClr>
                 </a:solidFill>
               </a:rPr>
-              <a:t>Here, the prompt gives two instructions:</a:t>
+              <a:t>Here, the prompt gives instructions, like :</a:t>
             </a:r>
           </a:p>
           <a:p>
@@ -4127,7 +4274,7 @@
                   </a:schemeClr>
                 </a:solidFill>
               </a:rPr>
-              <a:t>Explain in simple language.</a:t>
+              <a:t> Explain in simple language.</a:t>
             </a:r>
           </a:p>
           <a:p>
@@ -4144,7 +4291,7 @@
                   </a:schemeClr>
                 </a:solidFill>
               </a:rPr>
-              <a:t>Keep the answer under 100 words.</a:t>
+              <a:t> Keep the answer under 100 words.</a:t>
             </a:r>
           </a:p>
         </p:txBody>
@@ -4324,7 +4471,29 @@
                   </a:schemeClr>
                 </a:solidFill>
               </a:rPr>
-              <a:t>Instruction: Summarize in one sentence.</a:t>
+              <a:t>Instruction: The audience is &lt;</a:t>
+            </a:r>
+            <a:r>
+              <a:rPr lang="en-US" sz="2400" b="1" u="sng" dirty="0" err="1">
+                <a:solidFill>
+                  <a:schemeClr val="accent4">
+                    <a:lumMod val="60000"/>
+                    <a:lumOff val="40000"/>
+                  </a:schemeClr>
+                </a:solidFill>
+              </a:rPr>
+              <a:t>audience_here</a:t>
+            </a:r>
+            <a:r>
+              <a:rPr lang="en-US" sz="2400" b="1" u="sng" dirty="0">
+                <a:solidFill>
+                  <a:schemeClr val="accent4">
+                    <a:lumMod val="60000"/>
+                    <a:lumOff val="40000"/>
+                  </a:schemeClr>
+                </a:solidFill>
+              </a:rPr>
+              <a:t>&gt;</a:t>
             </a:r>
           </a:p>
         </p:txBody>
@@ -4478,7 +4647,7 @@
                   </a:schemeClr>
                 </a:solidFill>
               </a:rPr>
-              <a:t>Write Python code.</a:t>
+              <a:t>Write Python code .</a:t>
             </a:r>
           </a:p>
           <a:p>
@@ -4531,17 +4700,6 @@
           </a:p>
           <a:p>
             <a:r>
-              <a:rPr lang="en-US" sz="2400">
-                <a:solidFill>
-                  <a:schemeClr val="accent6">
-                    <a:lumMod val="60000"/>
-                    <a:lumOff val="40000"/>
-                  </a:schemeClr>
-                </a:solidFill>
-              </a:rPr>
-              <a:t>(See </a:t>
-            </a:r>
-            <a:r>
               <a:rPr lang="en-US" sz="2400" dirty="0">
                 <a:solidFill>
                   <a:schemeClr val="accent6">
@@ -4550,27 +4708,8 @@
                   </a:schemeClr>
                 </a:solidFill>
               </a:rPr>
-              <a:t>next page </a:t>
-            </a:r>
-            <a:r>
-              <a:rPr lang="en-US" sz="2400">
-                <a:solidFill>
-                  <a:schemeClr val="accent6">
-                    <a:lumMod val="60000"/>
-                    <a:lumOff val="40000"/>
-                  </a:schemeClr>
-                </a:solidFill>
-              </a:rPr>
-              <a:t>for output)</a:t>
-            </a:r>
-            <a:endParaRPr lang="en-US" sz="2400" dirty="0">
-              <a:solidFill>
-                <a:schemeClr val="accent6">
-                  <a:lumMod val="60000"/>
-                  <a:lumOff val="40000"/>
-                </a:schemeClr>
-              </a:solidFill>
-            </a:endParaRPr>
+              <a:t>(See next page for output)</a:t>
+            </a:r>
           </a:p>
         </p:txBody>
       </p:sp>
